--- a/classes/parte-0-fundamentos-y-prerrequisitos/007-bash-scripting-para-tareas-de-seguridad/clase-007-presentacion.pptx
+++ b/classes/parte-0-fundamentos-y-prerrequisitos/007-bash-scripting-para-tareas-de-seguridad/clase-007-presentacion.pptx
@@ -17,6 +17,9 @@
     <p:sldId id="265" r:id="rId16"/>
     <p:sldId id="266" r:id="rId17"/>
     <p:sldId id="267" r:id="rId18"/>
+    <p:sldId id="268" r:id="rId19"/>
+    <p:sldId id="269" r:id="rId20"/>
+    <p:sldId id="270" r:id="rId21"/>
   </p:sldIdLst>
   <p:sldSz cx="9144000" cy="6858000" type="screen4x3"/>
   <p:notesSz cx="6858000" cy="9144000"/>
@@ -3198,7 +3201,7 @@
                   <a:srgbClr val="0B3D2E"/>
                 </a:solidFill>
               </a:rPr>
-              <a:t>⚠️ Errores comunes</a:t>
+              <a:t>✍️ Ejercicios</a:t>
             </a:r>
           </a:p>
         </p:txBody>
@@ -3236,67 +3239,97 @@
                   <a:srgbClr val="22282E"/>
                 </a:solidFill>
               </a:rPr>
-              <a:t>•  unbound variable — Variable usada sin definir con set -u activo. Da valor por defecto (${x:-}) o defínela.</a:t>
-            </a:r>
-          </a:p>
-          <a:p>
-            <a:pPr>
-              <a:spcAft>
-                <a:spcPts val="600"/>
-              </a:spcAft>
-            </a:pPr>
-            <a:r>
-              <a:rPr sz="1500">
-                <a:solidFill>
-                  <a:srgbClr val="22282E"/>
-                </a:solidFill>
-              </a:rPr>
-              <a:t>•  El script "come" archivos con espacios — Falta de comillas. Entrecomilla siempre "$var" y usa "$@".</a:t>
-            </a:r>
-          </a:p>
-          <a:p>
-            <a:pPr>
-              <a:spcAft>
-                <a:spcPts val="600"/>
-              </a:spcAft>
-            </a:pPr>
-            <a:r>
-              <a:rPr sz="1500">
-                <a:solidFill>
-                  <a:srgbClr val="22282E"/>
-                </a:solidFill>
-              </a:rPr>
-              <a:t>•  El pipe falla pero el script sigue — Sin pipefail, solo cuenta el último comando. Añade set -o pipefail.</a:t>
-            </a:r>
-          </a:p>
-          <a:p>
-            <a:pPr>
-              <a:spcAft>
-                <a:spcPts val="600"/>
-              </a:spcAft>
-            </a:pPr>
-            <a:r>
-              <a:rPr sz="1500">
-                <a:solidFill>
-                  <a:srgbClr val="22282E"/>
-                </a:solidFill>
-              </a:rPr>
-              <a:t>•  [: ==: unary operator expected — Comparación sin comillas y variable vacía. Usa [[ ]] y comillas.</a:t>
-            </a:r>
-          </a:p>
-          <a:p>
-            <a:pPr>
-              <a:spcAft>
-                <a:spcPts val="600"/>
-              </a:spcAft>
-            </a:pPr>
-            <a:r>
-              <a:rPr sz="1500">
-                <a:solidFill>
-                  <a:srgbClr val="22282E"/>
-                </a:solidFill>
-              </a:rPr>
-              <a:t>•  Permission denied al ejecutar — Falta chmod +x o el shebang es incorrecto.</a:t>
+              <a:t>•  Añade a barrido.sh la opción -p PUERTO con getopts para probar un puerto TCP con nc -z.</a:t>
+            </a:r>
+          </a:p>
+          <a:p>
+            <a:pPr>
+              <a:spcAft>
+                <a:spcPts val="600"/>
+              </a:spcAft>
+            </a:pPr>
+            <a:r>
+              <a:rPr sz="1500">
+                <a:solidFill>
+                  <a:srgbClr val="22282E"/>
+                </a:solidFill>
+              </a:rPr>
+              <a:t>•  Escribe un script que reciba una lista de hosts desde un archivo y los recorra con while read.</a:t>
+            </a:r>
+          </a:p>
+          <a:p>
+            <a:pPr>
+              <a:spcAft>
+                <a:spcPts val="600"/>
+              </a:spcAft>
+            </a:pPr>
+            <a:r>
+              <a:rPr sz="1500">
+                <a:solidFill>
+                  <a:srgbClr val="22282E"/>
+                </a:solidFill>
+              </a:rPr>
+              <a:t>•  Implementa manejo de errores: si falta nmap, avisa por stderr y termina con un código distinto de 0.</a:t>
+            </a:r>
+          </a:p>
+          <a:p>
+            <a:pPr>
+              <a:spcAft>
+                <a:spcPts val="600"/>
+              </a:spcAft>
+            </a:pPr>
+            <a:r>
+              <a:rPr sz="1500">
+                <a:solidFill>
+                  <a:srgbClr val="22282E"/>
+                </a:solidFill>
+              </a:rPr>
+              <a:t>•  Crea una función esipvalida() que valide que el argumento es una IPv4 bien formada.</a:t>
+            </a:r>
+          </a:p>
+          <a:p>
+            <a:pPr>
+              <a:spcAft>
+                <a:spcPts val="600"/>
+              </a:spcAft>
+            </a:pPr>
+            <a:r>
+              <a:rPr sz="1500">
+                <a:solidFill>
+                  <a:srgbClr val="22282E"/>
+                </a:solidFill>
+              </a:rPr>
+              <a:t>•  Usa trap para borrar un archivo temporal al salir, comprobando que también funciona con Ctrl+C.</a:t>
+            </a:r>
+          </a:p>
+          <a:p>
+            <a:pPr>
+              <a:spcAft>
+                <a:spcPts val="600"/>
+              </a:spcAft>
+            </a:pPr>
+            <a:r>
+              <a:rPr sz="1500">
+                <a:solidFill>
+                  <a:srgbClr val="22282E"/>
+                </a:solidFill>
+              </a:rPr>
+              <a:t>•  Escribe un mini auditor que revise 3 controles de hardening y devuelva un resumen con conteo de OK/FALLO.</a:t>
+            </a:r>
+          </a:p>
+          <a:p>
+            <a:pPr>
+              <a:spcAft>
+                <a:spcPts val="600"/>
+              </a:spcAft>
+            </a:pPr>
+            <a:r>
+              <a:rPr sz="1500">
+                <a:solidFill>
+                  <a:srgbClr val="22282E"/>
+                </a:solidFill>
+              </a:rPr>
+              <a:t>•  Modifica un script para que devuelva códigos de salida distintos según el tipo de fallo, y documéntalos.</a:t>
             </a:r>
           </a:p>
         </p:txBody>
@@ -3347,7 +3380,7 @@
                   <a:srgbClr val="0B3D2E"/>
                 </a:solidFill>
               </a:rPr>
-              <a:t>❓ Preguntas frecuentes</a:t>
+              <a:t>📝 Reto verificable</a:t>
             </a:r>
           </a:p>
         </p:txBody>
@@ -3385,52 +3418,22 @@
                   <a:srgbClr val="22282E"/>
                 </a:solidFill>
               </a:rPr>
-              <a:t>•  ❓ ¿Bash o Python para automatizar seguridad? Bash brilla pegando herramientas de línea de comandos y tareas rápidas del sistema. Para lógica compleja, estructuras de datos o red, Python (Clases 015–017) es mejor.</a:t>
-            </a:r>
-          </a:p>
-          <a:p>
-            <a:pPr>
-              <a:spcAft>
-                <a:spcPts val="600"/>
-              </a:spcAft>
-            </a:pPr>
-            <a:r>
-              <a:rPr sz="1500">
-                <a:solidFill>
-                  <a:srgbClr val="22282E"/>
-                </a:solidFill>
-              </a:rPr>
-              <a:t>•  ❓ ¿Por qué #!/usr/bin/env bash y no #!/bin/bash? env busca bash en el PATH, más portable entre distros donde bash puede estar en rutas distintas.</a:t>
-            </a:r>
-          </a:p>
-          <a:p>
-            <a:pPr>
-              <a:spcAft>
-                <a:spcPts val="600"/>
-              </a:spcAft>
-            </a:pPr>
-            <a:r>
-              <a:rPr sz="1500">
-                <a:solidFill>
-                  <a:srgbClr val="22282E"/>
-                </a:solidFill>
-              </a:rPr>
-              <a:t>•  ❓ ¿ShellCheck es imprescindible? Muy recomendable: detecta quoting, variables no usadas y bugs sutiles antes de que exploten. Intégralo en tu flujo.</a:t>
-            </a:r>
-          </a:p>
-          <a:p>
-            <a:pPr>
-              <a:spcAft>
-                <a:spcPts val="600"/>
-              </a:spcAft>
-            </a:pPr>
-            <a:r>
-              <a:rPr sz="1500">
-                <a:solidFill>
-                  <a:srgbClr val="22282E"/>
-                </a:solidFill>
-              </a:rPr>
-              <a:t>•  ❓ ¿Cómo depuro un script? Ejecuta con bash -x script.sh para ver cada comando expandido, o añade set -x en la sección a inspeccionar.</a:t>
+              <a:t>•  Entrega un script auditor.sh parametrizable que reciba una subred, descubra hosts activos, para cada uno compruebe si tiene el puerto 22 o 80 abierto, y genere un informe con marca de tiempo. Debe…</a:t>
+            </a:r>
+          </a:p>
+          <a:p>
+            <a:pPr>
+              <a:spcAft>
+                <a:spcPts val="600"/>
+              </a:spcAft>
+            </a:pPr>
+            <a:r>
+              <a:rPr sz="1500">
+                <a:solidFill>
+                  <a:srgbClr val="22282E"/>
+                </a:solidFill>
+              </a:rPr>
+              <a:t>•  Criterio de aceptación: shellcheck auditor.sh no reporta problemas; ejecutado contra tu laboratorio produce un archivo de informe legible con hosts y puertos; y ante un argumento inválido termina con…</a:t>
             </a:r>
           </a:p>
         </p:txBody>
@@ -3481,7 +3484,7 @@
                   <a:srgbClr val="0B3D2E"/>
                 </a:solidFill>
               </a:rPr>
-              <a:t>🔗 Referencias</a:t>
+              <a:t>⚠️ Errores comunes</a:t>
             </a:r>
           </a:p>
         </p:txBody>
@@ -3519,6 +3522,304 @@
                   <a:srgbClr val="22282E"/>
                 </a:solidFill>
               </a:rPr>
+              <a:t>•  unbound variable — Variable usada sin definir con set -u activo. Dale valor por defecto (${x:-}) o defínela antes.</a:t>
+            </a:r>
+          </a:p>
+          <a:p>
+            <a:pPr>
+              <a:spcAft>
+                <a:spcPts val="600"/>
+              </a:spcAft>
+            </a:pPr>
+            <a:r>
+              <a:rPr sz="1500">
+                <a:solidFill>
+                  <a:srgbClr val="22282E"/>
+                </a:solidFill>
+              </a:rPr>
+              <a:t>•  El script "come" archivos con espacios — Falta de comillas. Entrecomilla siempre "$var" y usa "$@" para los argumentos.</a:t>
+            </a:r>
+          </a:p>
+          <a:p>
+            <a:pPr>
+              <a:spcAft>
+                <a:spcPts val="600"/>
+              </a:spcAft>
+            </a:pPr>
+            <a:r>
+              <a:rPr sz="1500">
+                <a:solidFill>
+                  <a:srgbClr val="22282E"/>
+                </a:solidFill>
+              </a:rPr>
+              <a:t>•  El pipe falla pero el script sigue — Sin pipefail, solo cuenta el último comando de la tubería. Añade set -o pipefail.</a:t>
+            </a:r>
+          </a:p>
+          <a:p>
+            <a:pPr>
+              <a:spcAft>
+                <a:spcPts val="600"/>
+              </a:spcAft>
+            </a:pPr>
+            <a:r>
+              <a:rPr sz="1500">
+                <a:solidFill>
+                  <a:srgbClr val="22282E"/>
+                </a:solidFill>
+              </a:rPr>
+              <a:t>•  [: ==: unary operator expected — Comparación con variable vacía sin comillas. Usa [[ ]] y entrecomilla los operandos.</a:t>
+            </a:r>
+          </a:p>
+          <a:p>
+            <a:pPr>
+              <a:spcAft>
+                <a:spcPts val="600"/>
+              </a:spcAft>
+            </a:pPr>
+            <a:r>
+              <a:rPr sz="1500">
+                <a:solidFill>
+                  <a:srgbClr val="22282E"/>
+                </a:solidFill>
+              </a:rPr>
+              <a:t>•  Permission denied al ejecutar — Falta chmod +x o el shebang es incorrecto. Revisa ambos.</a:t>
+            </a:r>
+          </a:p>
+          <a:p>
+            <a:pPr>
+              <a:spcAft>
+                <a:spcPts val="600"/>
+              </a:spcAft>
+            </a:pPr>
+            <a:r>
+              <a:rPr sz="1500">
+                <a:solidFill>
+                  <a:srgbClr val="22282E"/>
+                </a:solidFill>
+              </a:rPr>
+              <a:t>•  set -e no aborta donde esperas — Está dentro de un if o de una cadena con &amp;&amp; u or lógico, contextos donde -e se desactiva. Comprueba el estado explícitamente.</a:t>
+            </a:r>
+          </a:p>
+        </p:txBody>
+      </p:sp>
+    </p:spTree>
+  </p:cSld>
+  <p:clrMapOvr>
+    <a:masterClrMapping/>
+  </p:clrMapOvr>
+</p:sld>
+</file>
+
+<file path=ppt/slides/slide13.xml><?xml version="1.0" encoding="utf-8"?>
+<p:sld xmlns:a="http://schemas.openxmlformats.org/drawingml/2006/main" xmlns:p="http://schemas.openxmlformats.org/presentationml/2006/main" xmlns:r="http://schemas.openxmlformats.org/officeDocument/2006/relationships">
+  <p:cSld>
+    <p:spTree>
+      <p:nvGrpSpPr>
+        <p:cNvPr id="1" name=""/>
+        <p:cNvGrpSpPr/>
+        <p:nvPr/>
+      </p:nvGrpSpPr>
+      <p:grpSpPr/>
+      <p:sp>
+        <p:nvSpPr>
+          <p:cNvPr id="2" name="TextBox 1"/>
+          <p:cNvSpPr txBox="1"/>
+          <p:nvPr/>
+        </p:nvSpPr>
+        <p:spPr>
+          <a:xfrm>
+            <a:off x="457200" y="320040"/>
+            <a:ext cx="8229600" cy="822960"/>
+          </a:xfrm>
+          <a:prstGeom prst="rect">
+            <a:avLst/>
+          </a:prstGeom>
+          <a:noFill/>
+        </p:spPr>
+        <p:txBody>
+          <a:bodyPr wrap="square">
+            <a:spAutoFit/>
+          </a:bodyPr>
+          <a:lstStyle/>
+          <a:p>
+            <a:r>
+              <a:rPr sz="2600" b="1">
+                <a:solidFill>
+                  <a:srgbClr val="0B3D2E"/>
+                </a:solidFill>
+              </a:rPr>
+              <a:t>❓ Preguntas frecuentes</a:t>
+            </a:r>
+          </a:p>
+        </p:txBody>
+      </p:sp>
+      <p:sp>
+        <p:nvSpPr>
+          <p:cNvPr id="3" name="TextBox 2"/>
+          <p:cNvSpPr txBox="1"/>
+          <p:nvPr/>
+        </p:nvSpPr>
+        <p:spPr>
+          <a:xfrm>
+            <a:off x="457200" y="1280160"/>
+            <a:ext cx="8229600" cy="4937760"/>
+          </a:xfrm>
+          <a:prstGeom prst="rect">
+            <a:avLst/>
+          </a:prstGeom>
+          <a:noFill/>
+        </p:spPr>
+        <p:txBody>
+          <a:bodyPr wrap="square">
+            <a:spAutoFit/>
+          </a:bodyPr>
+          <a:lstStyle/>
+          <a:p>
+            <a:pPr>
+              <a:spcAft>
+                <a:spcPts val="600"/>
+              </a:spcAft>
+            </a:pPr>
+            <a:r>
+              <a:rPr sz="1500">
+                <a:solidFill>
+                  <a:srgbClr val="22282E"/>
+                </a:solidFill>
+              </a:rPr>
+              <a:t>•  ❓ ¿Bash o Python para automatizar seguridad? Bash brilla pegando herramientas de línea de comandos y en tareas rápidas del sistema. Para lógica compleja, estructuras de datos, parsing robusto o red…</a:t>
+            </a:r>
+          </a:p>
+          <a:p>
+            <a:pPr>
+              <a:spcAft>
+                <a:spcPts val="600"/>
+              </a:spcAft>
+            </a:pPr>
+            <a:r>
+              <a:rPr sz="1500">
+                <a:solidFill>
+                  <a:srgbClr val="22282E"/>
+                </a:solidFill>
+              </a:rPr>
+              <a:t>•  ❓ ¿Por qué #!/usr/bin/env bash y no #!/bin/bash? Porque env busca bash en el PATH, lo que hace el script portable entre distribuciones donde bash puede vivir en rutas distintas. La ruta fija…</a:t>
+            </a:r>
+          </a:p>
+          <a:p>
+            <a:pPr>
+              <a:spcAft>
+                <a:spcPts val="600"/>
+              </a:spcAft>
+            </a:pPr>
+            <a:r>
+              <a:rPr sz="1500">
+                <a:solidFill>
+                  <a:srgbClr val="22282E"/>
+                </a:solidFill>
+              </a:rPr>
+              <a:t>•  ❓ ¿ShellCheck es imprescindible? Muy recomendable. Detecta quoting olvidado, variables no usadas y bugs sutiles antes de que exploten en producción, y cada aviso viene con explicación. Intégralo en…</a:t>
+            </a:r>
+          </a:p>
+          <a:p>
+            <a:pPr>
+              <a:spcAft>
+                <a:spcPts val="600"/>
+              </a:spcAft>
+            </a:pPr>
+            <a:r>
+              <a:rPr sz="1500">
+                <a:solidFill>
+                  <a:srgbClr val="22282E"/>
+                </a:solidFill>
+              </a:rPr>
+              <a:t>•  ❓ ¿Cómo depuro un script? Ejecútalo con bash -x script.sh para ver cada comando ya expandido, o inserta set -x justo antes de la sección que quieres inspeccionar y set +x después para acotar la traza.</a:t>
+            </a:r>
+          </a:p>
+        </p:txBody>
+      </p:sp>
+    </p:spTree>
+  </p:cSld>
+  <p:clrMapOvr>
+    <a:masterClrMapping/>
+  </p:clrMapOvr>
+</p:sld>
+</file>
+
+<file path=ppt/slides/slide14.xml><?xml version="1.0" encoding="utf-8"?>
+<p:sld xmlns:a="http://schemas.openxmlformats.org/drawingml/2006/main" xmlns:p="http://schemas.openxmlformats.org/presentationml/2006/main" xmlns:r="http://schemas.openxmlformats.org/officeDocument/2006/relationships">
+  <p:cSld>
+    <p:spTree>
+      <p:nvGrpSpPr>
+        <p:cNvPr id="1" name=""/>
+        <p:cNvGrpSpPr/>
+        <p:nvPr/>
+      </p:nvGrpSpPr>
+      <p:grpSpPr/>
+      <p:sp>
+        <p:nvSpPr>
+          <p:cNvPr id="2" name="TextBox 1"/>
+          <p:cNvSpPr txBox="1"/>
+          <p:nvPr/>
+        </p:nvSpPr>
+        <p:spPr>
+          <a:xfrm>
+            <a:off x="457200" y="320040"/>
+            <a:ext cx="8229600" cy="822960"/>
+          </a:xfrm>
+          <a:prstGeom prst="rect">
+            <a:avLst/>
+          </a:prstGeom>
+          <a:noFill/>
+        </p:spPr>
+        <p:txBody>
+          <a:bodyPr wrap="square">
+            <a:spAutoFit/>
+          </a:bodyPr>
+          <a:lstStyle/>
+          <a:p>
+            <a:r>
+              <a:rPr sz="2600" b="1">
+                <a:solidFill>
+                  <a:srgbClr val="0B3D2E"/>
+                </a:solidFill>
+              </a:rPr>
+              <a:t>🔗 Referencias</a:t>
+            </a:r>
+          </a:p>
+        </p:txBody>
+      </p:sp>
+      <p:sp>
+        <p:nvSpPr>
+          <p:cNvPr id="3" name="TextBox 2"/>
+          <p:cNvSpPr txBox="1"/>
+          <p:nvPr/>
+        </p:nvSpPr>
+        <p:spPr>
+          <a:xfrm>
+            <a:off x="457200" y="1280160"/>
+            <a:ext cx="8229600" cy="4937760"/>
+          </a:xfrm>
+          <a:prstGeom prst="rect">
+            <a:avLst/>
+          </a:prstGeom>
+          <a:noFill/>
+        </p:spPr>
+        <p:txBody>
+          <a:bodyPr wrap="square">
+            <a:spAutoFit/>
+          </a:bodyPr>
+          <a:lstStyle/>
+          <a:p>
+            <a:pPr>
+              <a:spcAft>
+                <a:spcPts val="600"/>
+              </a:spcAft>
+            </a:pPr>
+            <a:r>
+              <a:rPr sz="1500">
+                <a:solidFill>
+                  <a:srgbClr val="22282E"/>
+                </a:solidFill>
+              </a:rPr>
               <a:t>•  GNU Bash Reference Manual — &lt;https://www.gnu.org/software/bash/manual/&gt;</a:t>
             </a:r>
           </a:p>
@@ -3564,11 +3865,86 @@
                   <a:srgbClr val="22282E"/>
                 </a:solidFill>
               </a:rPr>
-              <a:t>•  man 1 bash</a:t>
-            </a:r>
-          </a:p>
-        </p:txBody>
-      </p:sp>
+              <a:t>•  man 1 bash — sección de expansiones y palabras reservadas</a:t>
+            </a:r>
+          </a:p>
+        </p:txBody>
+      </p:sp>
+    </p:spTree>
+  </p:cSld>
+  <p:clrMapOvr>
+    <a:masterClrMapping/>
+  </p:clrMapOvr>
+</p:sld>
+</file>
+
+<file path=ppt/slides/slide15.xml><?xml version="1.0" encoding="utf-8"?>
+<p:sld xmlns:a="http://schemas.openxmlformats.org/drawingml/2006/main" xmlns:p="http://schemas.openxmlformats.org/presentationml/2006/main" xmlns:r="http://schemas.openxmlformats.org/officeDocument/2006/relationships">
+  <p:cSld>
+    <p:spTree>
+      <p:nvGrpSpPr>
+        <p:cNvPr id="1" name=""/>
+        <p:cNvGrpSpPr/>
+        <p:nvPr/>
+      </p:nvGrpSpPr>
+      <p:grpSpPr/>
+      <p:sp>
+        <p:nvSpPr>
+          <p:cNvPr id="2" name="TextBox 1"/>
+          <p:cNvSpPr txBox="1"/>
+          <p:nvPr/>
+        </p:nvSpPr>
+        <p:spPr>
+          <a:xfrm>
+            <a:off x="457200" y="274320"/>
+            <a:ext cx="8229600" cy="640080"/>
+          </a:xfrm>
+          <a:prstGeom prst="rect">
+            <a:avLst/>
+          </a:prstGeom>
+          <a:noFill/>
+        </p:spPr>
+        <p:txBody>
+          <a:bodyPr wrap="square">
+            <a:spAutoFit/>
+          </a:bodyPr>
+          <a:lstStyle/>
+          <a:p>
+            <a:r>
+              <a:rPr sz="2200" b="1">
+                <a:solidFill>
+                  <a:srgbClr val="0B3D2E"/>
+                </a:solidFill>
+              </a:rPr>
+              <a:t>Diagrama de la clase</a:t>
+            </a:r>
+          </a:p>
+        </p:txBody>
+      </p:sp>
+      <p:pic>
+        <p:nvPicPr>
+          <p:cNvPr id="3" name="Picture 2" descr="b1aef5fc24c76b22.png"/>
+          <p:cNvPicPr>
+            <a:picLocks noChangeAspect="1"/>
+          </p:cNvPicPr>
+          <p:nvPr/>
+        </p:nvPicPr>
+        <p:blipFill>
+          <a:blip r:embed="rId2"/>
+          <a:stretch>
+            <a:fillRect/>
+          </a:stretch>
+        </p:blipFill>
+        <p:spPr>
+          <a:xfrm>
+            <a:off x="2551274" y="1097280"/>
+            <a:ext cx="4041452" cy="5303520"/>
+          </a:xfrm>
+          <a:prstGeom prst="rect">
+            <a:avLst/>
+          </a:prstGeom>
+        </p:spPr>
+      </p:pic>
     </p:spTree>
   </p:cSld>
   <p:clrMapOvr>
@@ -3653,7 +4029,7 @@
                   <a:srgbClr val="22282E"/>
                 </a:solidFill>
               </a:rPr>
-              <a:t>•  Automatizar tareas repetitivas de seguridad con scripts de Bash robustos: barridos de red, parsing de resultados, comprobaciones de hardening y orquestación de herramientas. Al terminar escribirás scripts con variables, condicionales, bucles, funciones y manejo de errores.</a:t>
+              <a:t>•  Pasar de teclear comandos sueltos a construir scripts de Bash robustos que automaticen tareas repetitivas de seguridad: barridos de red, parsing de resultados de herramientas, comprobaciones de…</a:t>
             </a:r>
           </a:p>
         </p:txBody>
@@ -3757,67 +4133,82 @@
                   <a:srgbClr val="22282E"/>
                 </a:solidFill>
               </a:rPr>
-              <a:t>•  Estructurar un script con shebang, variables y funciones.</a:t>
-            </a:r>
-          </a:p>
-          <a:p>
-            <a:pPr>
-              <a:spcAft>
-                <a:spcPts val="600"/>
-              </a:spcAft>
-            </a:pPr>
-            <a:r>
-              <a:rPr sz="1500">
-                <a:solidFill>
-                  <a:srgbClr val="22282E"/>
-                </a:solidFill>
-              </a:rPr>
-              <a:t>•  Usar condicionales, bucles y case para lógica de control.</a:t>
-            </a:r>
-          </a:p>
-          <a:p>
-            <a:pPr>
-              <a:spcAft>
-                <a:spcPts val="600"/>
-              </a:spcAft>
-            </a:pPr>
-            <a:r>
-              <a:rPr sz="1500">
-                <a:solidFill>
-                  <a:srgbClr val="22282E"/>
-                </a:solidFill>
-              </a:rPr>
-              <a:t>•  Manejar argumentos, entrada de usuario y códigos de salida.</a:t>
-            </a:r>
-          </a:p>
-          <a:p>
-            <a:pPr>
-              <a:spcAft>
-                <a:spcPts val="600"/>
-              </a:spcAft>
-            </a:pPr>
-            <a:r>
-              <a:rPr sz="1500">
-                <a:solidFill>
-                  <a:srgbClr val="22282E"/>
-                </a:solidFill>
-              </a:rPr>
-              <a:t>•  Aplicar buenas prácticas de robustez (set -euo pipefail, comillas).</a:t>
-            </a:r>
-          </a:p>
-          <a:p>
-            <a:pPr>
-              <a:spcAft>
-                <a:spcPts val="600"/>
-              </a:spcAft>
-            </a:pPr>
-            <a:r>
-              <a:rPr sz="1500">
-                <a:solidFill>
-                  <a:srgbClr val="22282E"/>
-                </a:solidFill>
-              </a:rPr>
-              <a:t>•  Automatizar una tarea real de seguridad de principio a fin.</a:t>
+              <a:t>•  Estructurar un script con shebang, variables, funciones y una organización legible.</a:t>
+            </a:r>
+          </a:p>
+          <a:p>
+            <a:pPr>
+              <a:spcAft>
+                <a:spcPts val="600"/>
+              </a:spcAft>
+            </a:pPr>
+            <a:r>
+              <a:rPr sz="1500">
+                <a:solidFill>
+                  <a:srgbClr val="22282E"/>
+                </a:solidFill>
+              </a:rPr>
+              <a:t>•  Usar condicionales [[ ]], bucles for/while y case para lógica de control.</a:t>
+            </a:r>
+          </a:p>
+          <a:p>
+            <a:pPr>
+              <a:spcAft>
+                <a:spcPts val="600"/>
+              </a:spcAft>
+            </a:pPr>
+            <a:r>
+              <a:rPr sz="1500">
+                <a:solidFill>
+                  <a:srgbClr val="22282E"/>
+                </a:solidFill>
+              </a:rPr>
+              <a:t>•  Manejar argumentos con getopts, entrada del usuario y códigos de salida.</a:t>
+            </a:r>
+          </a:p>
+          <a:p>
+            <a:pPr>
+              <a:spcAft>
+                <a:spcPts val="600"/>
+              </a:spcAft>
+            </a:pPr>
+            <a:r>
+              <a:rPr sz="1500">
+                <a:solidFill>
+                  <a:srgbClr val="22282E"/>
+                </a:solidFill>
+              </a:rPr>
+              <a:t>•  Aplicar buenas prácticas de robustez (set -euo pipefail, comillas, trap).</a:t>
+            </a:r>
+          </a:p>
+          <a:p>
+            <a:pPr>
+              <a:spcAft>
+                <a:spcPts val="600"/>
+              </a:spcAft>
+            </a:pPr>
+            <a:r>
+              <a:rPr sz="1500">
+                <a:solidFill>
+                  <a:srgbClr val="22282E"/>
+                </a:solidFill>
+              </a:rPr>
+              <a:t>•  Automatizar una tarea real de seguridad de principio a fin, con informe reproducible.</a:t>
+            </a:r>
+          </a:p>
+          <a:p>
+            <a:pPr>
+              <a:spcAft>
+                <a:spcPts val="600"/>
+              </a:spcAft>
+            </a:pPr>
+            <a:r>
+              <a:rPr sz="1500">
+                <a:solidFill>
+                  <a:srgbClr val="22282E"/>
+                </a:solidFill>
+              </a:rPr>
+              <a:t>•  Validar el código con ShellCheck y corregir los avisos antes de darlo por terminado.</a:t>
             </a:r>
           </a:p>
         </p:txBody>
@@ -4047,7 +4438,7 @@
                   <a:srgbClr val="0B3D2E"/>
                 </a:solidFill>
               </a:rPr>
-              <a:t>📖 Definiciones y características</a:t>
+              <a:t>🧠 Explicación en profundidad</a:t>
             </a:r>
           </a:p>
         </p:txBody>
@@ -4085,82 +4476,97 @@
                   <a:srgbClr val="22282E"/>
                 </a:solidFill>
               </a:rPr>
-              <a:t>•  Shebang (#!/usr/bin/env bash): primera línea que indica el intérprete. Clave: usa env para portabilidad.</a:t>
-            </a:r>
-          </a:p>
-          <a:p>
-            <a:pPr>
-              <a:spcAft>
-                <a:spcPts val="600"/>
-              </a:spcAft>
-            </a:pPr>
-            <a:r>
-              <a:rPr sz="1500">
-                <a:solidFill>
-                  <a:srgbClr val="22282E"/>
-                </a:solidFill>
-              </a:rPr>
-              <a:t>•  Sustitución de comandos ($(...)): captura la salida de un comando en una variable. Clave: prefiérela a las backticks.</a:t>
-            </a:r>
-          </a:p>
-          <a:p>
-            <a:pPr>
-              <a:spcAft>
-                <a:spcPts val="600"/>
-              </a:spcAft>
-            </a:pPr>
-            <a:r>
-              <a:rPr sz="1500">
-                <a:solidFill>
-                  <a:srgbClr val="22282E"/>
-                </a:solidFill>
-              </a:rPr>
-              <a:t>•  set -euo pipefail: aborta ante errores, variables no definidas y fallos en pipes. Clave: convierte scripts frágiles en robustos.</a:t>
-            </a:r>
-          </a:p>
-          <a:p>
-            <a:pPr>
-              <a:spcAft>
-                <a:spcPts val="600"/>
-              </a:spcAft>
-            </a:pPr>
-            <a:r>
-              <a:rPr sz="1500">
-                <a:solidFill>
-                  <a:srgbClr val="22282E"/>
-                </a:solidFill>
-              </a:rPr>
-              <a:t>•  Quoting: entrecomillar variables ("$var") evita word splitting y globbing. Clave: causa nº1 de bugs y de inyección.</a:t>
-            </a:r>
-          </a:p>
-          <a:p>
-            <a:pPr>
-              <a:spcAft>
-                <a:spcPts val="600"/>
-              </a:spcAft>
-            </a:pPr>
-            <a:r>
-              <a:rPr sz="1500">
-                <a:solidFill>
-                  <a:srgbClr val="22282E"/>
-                </a:solidFill>
-              </a:rPr>
-              <a:t>•  Código de salida: entero 0–255; 0 = éxito. Clave: $? lo lee; permite encadenar con &amp;&amp;/||.</a:t>
-            </a:r>
-          </a:p>
-          <a:p>
-            <a:pPr>
-              <a:spcAft>
-                <a:spcPts val="600"/>
-              </a:spcAft>
-            </a:pPr>
-            <a:r>
-              <a:rPr sz="1500">
-                <a:solidFill>
-                  <a:srgbClr val="22282E"/>
-                </a:solidFill>
-              </a:rPr>
-              <a:t>•  Trap: captura señales/eventos para limpiar (trap 'rm -f "$tmp"' EXIT). Clave: higiene ante interrupciones.</a:t>
+              <a:t>•  Un script no es más que un archivo de texto con comandos que la shell ejecuta en orden. Lo que convierte ese texto en un programa ejecutable es la primera línea, el shebang: #!/usr/bin/env bash.…</a:t>
+            </a:r>
+          </a:p>
+          <a:p>
+            <a:pPr>
+              <a:spcAft>
+                <a:spcPts val="600"/>
+              </a:spcAft>
+            </a:pPr>
+            <a:r>
+              <a:rPr sz="1500">
+                <a:solidFill>
+                  <a:srgbClr val="22282E"/>
+                </a:solidFill>
+              </a:rPr>
+              <a:t>•  En Bash las variables se asignan sin espacios alrededor del = (red="10.10.10") y se expanden con $red o, de forma más segura, ${red}. La sustitución de comandos $(comando) captura la salida de un…</a:t>
+            </a:r>
+          </a:p>
+          <a:p>
+            <a:pPr>
+              <a:spcAft>
+                <a:spcPts val="600"/>
+              </a:spcAft>
+            </a:pPr>
+            <a:r>
+              <a:rPr sz="1500">
+                <a:solidFill>
+                  <a:srgbClr val="22282E"/>
+                </a:solidFill>
+              </a:rPr>
+              <a:t>•  Aquí está la lección más importante de toda la clase: entrecomilla siempre tus variables. Escribir "$var" en lugar de $var evita el word splitting (que Bash parta el valor por espacios) y el globbing…</a:t>
+            </a:r>
+          </a:p>
+          <a:p>
+            <a:pPr>
+              <a:spcAft>
+                <a:spcPts val="600"/>
+              </a:spcAft>
+            </a:pPr>
+            <a:r>
+              <a:rPr sz="1500">
+                <a:solidFill>
+                  <a:srgbClr val="22282E"/>
+                </a:solidFill>
+              </a:rPr>
+              <a:t>•  Bash toma decisiones con [[ condición ]], la forma moderna y segura de test (más robusta que el antiguo [ ] porque no sufre word splitting dentro de los corchetes y admite operadores como =~ para…</a:t>
+            </a:r>
+          </a:p>
+          <a:p>
+            <a:pPr>
+              <a:spcAft>
+                <a:spcPts val="600"/>
+              </a:spcAft>
+            </a:pPr>
+            <a:r>
+              <a:rPr sz="1500">
+                <a:solidFill>
+                  <a:srgbClr val="22282E"/>
+                </a:solidFill>
+              </a:rPr>
+              <a:t>•  Por defecto, Bash es peligrosamente permisivo: si un comando falla, el script sigue adelante como si nada; si usas una variable inexistente, la trata como cadena vacía; y en una tubería solo importa…</a:t>
+            </a:r>
+          </a:p>
+          <a:p>
+            <a:pPr>
+              <a:spcAft>
+                <a:spcPts val="600"/>
+              </a:spcAft>
+            </a:pPr>
+            <a:r>
+              <a:rPr sz="1500">
+                <a:solidFill>
+                  <a:srgbClr val="22282E"/>
+                </a:solidFill>
+              </a:rPr>
+              <a:t>•  La otra herramienta de robustez es trap, que captura señales y eventos para ejecutar código de limpieza. trap 'rm -f "$tmp"' EXIT garantiza que el archivo temporal se borre al salir del script, tanto…</a:t>
+            </a:r>
+          </a:p>
+          <a:p>
+            <a:pPr>
+              <a:spcAft>
+                <a:spcPts val="600"/>
+              </a:spcAft>
+            </a:pPr>
+            <a:r>
+              <a:rPr sz="1500">
+                <a:solidFill>
+                  <a:srgbClr val="22282E"/>
+                </a:solidFill>
+              </a:rPr>
+              <a:t>•  Todo comando devuelve al terminar un código de salida: un entero de 0 a 255 donde 0 significa éxito y cualquier otro valor indica un tipo de fallo. La variable especial $? contiene el del último…</a:t>
             </a:r>
           </a:p>
         </p:txBody>
@@ -4211,7 +4617,7 @@
                   <a:srgbClr val="0B3D2E"/>
                 </a:solidFill>
               </a:rPr>
-              <a:t>🧰 Herramientas y preparación</a:t>
+              <a:t>📖 Definiciones y características</a:t>
             </a:r>
           </a:p>
         </p:txBody>
@@ -4249,37 +4655,97 @@
                   <a:srgbClr val="22282E"/>
                 </a:solidFill>
               </a:rPr>
-              <a:t>•  Necesitas Bash (ya presente en Linux/Kali), un editor (nano, vim o VS Code) y ShellCheck para análisis estático:</a:t>
-            </a:r>
-          </a:p>
-          <a:p>
-            <a:pPr>
-              <a:spcAft>
-                <a:spcPts val="600"/>
-              </a:spcAft>
-            </a:pPr>
-            <a:r>
-              <a:rPr sz="1500">
-                <a:solidFill>
-                  <a:srgbClr val="22282E"/>
-                </a:solidFill>
-              </a:rPr>
-              <a:t>•  sudo apt install shellcheck</a:t>
-            </a:r>
-          </a:p>
-          <a:p>
-            <a:pPr>
-              <a:spcAft>
-                <a:spcPts val="600"/>
-              </a:spcAft>
-            </a:pPr>
-            <a:r>
-              <a:rPr sz="1500">
-                <a:solidFill>
-                  <a:srgbClr val="22282E"/>
-                </a:solidFill>
-              </a:rPr>
-              <a:t>•  Ten a mano herramientas que orquestarás en las prácticas: ping, nc (netcat), nmap (si está instalado). Trabaja siempre en tu laboratorio aislado.</a:t>
+              <a:t>•  Shebang (#!/usr/bin/env bash): primera línea que le dice al kernel qué intérprete usar. Con env el script es portable entre distribuciones donde bash esté en rutas distintas. Sin shebang y sin…</a:t>
+            </a:r>
+          </a:p>
+          <a:p>
+            <a:pPr>
+              <a:spcAft>
+                <a:spcPts val="600"/>
+              </a:spcAft>
+            </a:pPr>
+            <a:r>
+              <a:rPr sz="1500">
+                <a:solidFill>
+                  <a:srgbClr val="22282E"/>
+                </a:solidFill>
+              </a:rPr>
+              <a:t>•  Sustitución de comandos ($(...)): captura la salida estándar de un comando en una cadena. Se anida sin problemas y se lee mejor que las backticks, que están desaconsejadas. Es como los scripts…</a:t>
+            </a:r>
+          </a:p>
+          <a:p>
+            <a:pPr>
+              <a:spcAft>
+                <a:spcPts val="600"/>
+              </a:spcAft>
+            </a:pPr>
+            <a:r>
+              <a:rPr sz="1500">
+                <a:solidFill>
+                  <a:srgbClr val="22282E"/>
+                </a:solidFill>
+              </a:rPr>
+              <a:t>•  Expansión de parámetro (${x:-}, ${x:?}): mecanismos para dar valores por defecto o exigir que una variable exista. ${x:?mensaje} aborta con el mensaje si falta, perfecto para validar argumentos…</a:t>
+            </a:r>
+          </a:p>
+          <a:p>
+            <a:pPr>
+              <a:spcAft>
+                <a:spcPts val="600"/>
+              </a:spcAft>
+            </a:pPr>
+            <a:r>
+              <a:rPr sz="1500">
+                <a:solidFill>
+                  <a:srgbClr val="22282E"/>
+                </a:solidFill>
+              </a:rPr>
+              <a:t>•  set -euo pipefail: el "modo estricto". -e aborta ante errores, -u ante variables no definidas y pipefail ante fallos en cualquier etapa de una tubería. Convierte scripts silenciosamente rotos en…</a:t>
+            </a:r>
+          </a:p>
+          <a:p>
+            <a:pPr>
+              <a:spcAft>
+                <a:spcPts val="600"/>
+              </a:spcAft>
+            </a:pPr>
+            <a:r>
+              <a:rPr sz="1500">
+                <a:solidFill>
+                  <a:srgbClr val="22282E"/>
+                </a:solidFill>
+              </a:rPr>
+              <a:t>•  Quoting: entrecomillar variables ("$var", "$@") evita word splitting y globbing. Es la causa número uno de bugs y de inyección en Bash. Regla simple: en la duda, pon comillas dobles.</a:t>
+            </a:r>
+          </a:p>
+          <a:p>
+            <a:pPr>
+              <a:spcAft>
+                <a:spcPts val="600"/>
+              </a:spcAft>
+            </a:pPr>
+            <a:r>
+              <a:rPr sz="1500">
+                <a:solidFill>
+                  <a:srgbClr val="22282E"/>
+                </a:solidFill>
+              </a:rPr>
+              <a:t>•  [[ ]]: la forma moderna de evaluar condiciones, más segura que [ ] porque no sufre word splitting y admite =~ para comparar contra regex. Usarla previene el clásico error unary operator expected.</a:t>
+            </a:r>
+          </a:p>
+          <a:p>
+            <a:pPr>
+              <a:spcAft>
+                <a:spcPts val="600"/>
+              </a:spcAft>
+            </a:pPr>
+            <a:r>
+              <a:rPr sz="1500">
+                <a:solidFill>
+                  <a:srgbClr val="22282E"/>
+                </a:solidFill>
+              </a:rPr>
+              <a:t>•  Función: bloque de código reutilizable con nombre que recibe argumentos posicionales. Declarar variables con local evita efectos colaterales. Refactorizar a funciones reduce la duplicación y la…</a:t>
             </a:r>
           </a:p>
         </p:txBody>
@@ -4330,7 +4796,7 @@
                   <a:srgbClr val="0B3D2E"/>
                 </a:solidFill>
               </a:rPr>
-              <a:t>🧪 Laboratorio guiado</a:t>
+              <a:t>📔 Glosario</a:t>
             </a:r>
           </a:p>
         </p:txBody>
@@ -4368,97 +4834,97 @@
                   <a:srgbClr val="22282E"/>
                 </a:solidFill>
               </a:rPr>
-              <a:t>•  Esqueleto robusto. Crea barrido.sh:</a:t>
-            </a:r>
-          </a:p>
-          <a:p>
-            <a:pPr>
-              <a:spcAft>
-                <a:spcPts val="600"/>
-              </a:spcAft>
-            </a:pPr>
-            <a:r>
-              <a:rPr sz="1500">
-                <a:solidFill>
-                  <a:srgbClr val="22282E"/>
-                </a:solidFill>
-              </a:rPr>
-              <a:t>•  set -euo pipefail</a:t>
-            </a:r>
-          </a:p>
-          <a:p>
-            <a:pPr>
-              <a:spcAft>
-                <a:spcPts val="600"/>
-              </a:spcAft>
-            </a:pPr>
-            <a:r>
-              <a:rPr sz="1500">
-                <a:solidFill>
-                  <a:srgbClr val="22282E"/>
-                </a:solidFill>
-              </a:rPr>
-              <a:t>•  red="${1:?Uso: $0 &lt;prefijo /24, p.ej. 10.10.10&gt;}"</a:t>
-            </a:r>
-          </a:p>
-          <a:p>
-            <a:pPr>
-              <a:spcAft>
-                <a:spcPts val="600"/>
-              </a:spcAft>
-            </a:pPr>
-            <a:r>
-              <a:rPr sz="1500">
-                <a:solidFill>
-                  <a:srgbClr val="22282E"/>
-                </a:solidFill>
-              </a:rPr>
-              <a:t>•  Bucle de descubrimiento (ping sweep) en tu red interna:</a:t>
-            </a:r>
-          </a:p>
-          <a:p>
-            <a:pPr>
-              <a:spcAft>
-                <a:spcPts val="600"/>
-              </a:spcAft>
-            </a:pPr>
-            <a:r>
-              <a:rPr sz="1500">
-                <a:solidFill>
-                  <a:srgbClr val="22282E"/>
-                </a:solidFill>
-              </a:rPr>
-              <a:t>•  for i in $(seq 1 254); do</a:t>
-            </a:r>
-          </a:p>
-          <a:p>
-            <a:pPr>
-              <a:spcAft>
-                <a:spcPts val="600"/>
-              </a:spcAft>
-            </a:pPr>
-            <a:r>
-              <a:rPr sz="1500">
-                <a:solidFill>
-                  <a:srgbClr val="22282E"/>
-                </a:solidFill>
-              </a:rPr>
-              <a:t>•  ip="${red}.${i}"</a:t>
-            </a:r>
-          </a:p>
-          <a:p>
-            <a:pPr>
-              <a:spcAft>
-                <a:spcPts val="600"/>
-              </a:spcAft>
-            </a:pPr>
-            <a:r>
-              <a:rPr sz="1500">
-                <a:solidFill>
-                  <a:srgbClr val="22282E"/>
-                </a:solidFill>
-              </a:rPr>
-              <a:t>•  if ping -c1 -W1 "$ip" &amp;&gt;/dev/null; then</a:t>
+              <a:t>•  Término — Definición concisa</a:t>
+            </a:r>
+          </a:p>
+          <a:p>
+            <a:pPr>
+              <a:spcAft>
+                <a:spcPts val="600"/>
+              </a:spcAft>
+            </a:pPr>
+            <a:r>
+              <a:rPr sz="1500">
+                <a:solidFill>
+                  <a:srgbClr val="22282E"/>
+                </a:solidFill>
+              </a:rPr>
+              <a:t>•  Shebang — Línea #! inicial que fija el intérprete del script</a:t>
+            </a:r>
+          </a:p>
+          <a:p>
+            <a:pPr>
+              <a:spcAft>
+                <a:spcPts val="600"/>
+              </a:spcAft>
+            </a:pPr>
+            <a:r>
+              <a:rPr sz="1500">
+                <a:solidFill>
+                  <a:srgbClr val="22282E"/>
+                </a:solidFill>
+              </a:rPr>
+              <a:t>•  PATH — Lista de directorios donde la shell busca ejecutables</a:t>
+            </a:r>
+          </a:p>
+          <a:p>
+            <a:pPr>
+              <a:spcAft>
+                <a:spcPts val="600"/>
+              </a:spcAft>
+            </a:pPr>
+            <a:r>
+              <a:rPr sz="1500">
+                <a:solidFill>
+                  <a:srgbClr val="22282E"/>
+                </a:solidFill>
+              </a:rPr>
+              <a:t>•  Word splitting — Partición de un valor no entrecomillado por espacios</a:t>
+            </a:r>
+          </a:p>
+          <a:p>
+            <a:pPr>
+              <a:spcAft>
+                <a:spcPts val="600"/>
+              </a:spcAft>
+            </a:pPr>
+            <a:r>
+              <a:rPr sz="1500">
+                <a:solidFill>
+                  <a:srgbClr val="22282E"/>
+                </a:solidFill>
+              </a:rPr>
+              <a:t>•  Globbing — Expansión de comodines (, ?) a nombres de archivo</a:t>
+            </a:r>
+          </a:p>
+          <a:p>
+            <a:pPr>
+              <a:spcAft>
+                <a:spcPts val="600"/>
+              </a:spcAft>
+            </a:pPr>
+            <a:r>
+              <a:rPr sz="1500">
+                <a:solidFill>
+                  <a:srgbClr val="22282E"/>
+                </a:solidFill>
+              </a:rPr>
+              <a:t>•  $(...) — Sustitución de comandos (captura su salida)</a:t>
+            </a:r>
+          </a:p>
+          <a:p>
+            <a:pPr>
+              <a:spcAft>
+                <a:spcPts val="600"/>
+              </a:spcAft>
+            </a:pPr>
+            <a:r>
+              <a:rPr sz="1500">
+                <a:solidFill>
+                  <a:srgbClr val="22282E"/>
+                </a:solidFill>
+              </a:rPr>
+              <a:t>•  set -e — Aborta el script si un comando falla</a:t>
             </a:r>
           </a:p>
         </p:txBody>
@@ -4509,7 +4975,7 @@
                   <a:srgbClr val="0B3D2E"/>
                 </a:solidFill>
               </a:rPr>
-              <a:t>✍️ Ejercicios</a:t>
+              <a:t>🧰 Herramientas y preparación</a:t>
             </a:r>
           </a:p>
         </p:txBody>
@@ -4547,82 +5013,22 @@
                   <a:srgbClr val="22282E"/>
                 </a:solidFill>
               </a:rPr>
-              <a:t>•  Añade a barrido.sh la opción -p PUERTO con getopts para probar un puerto TCP con nc -z.</a:t>
-            </a:r>
-          </a:p>
-          <a:p>
-            <a:pPr>
-              <a:spcAft>
-                <a:spcPts val="600"/>
-              </a:spcAft>
-            </a:pPr>
-            <a:r>
-              <a:rPr sz="1500">
-                <a:solidFill>
-                  <a:srgbClr val="22282E"/>
-                </a:solidFill>
-              </a:rPr>
-              <a:t>•  Escribe un script que reciba una lista de hosts por archivo y los recorra con while read.</a:t>
-            </a:r>
-          </a:p>
-          <a:p>
-            <a:pPr>
-              <a:spcAft>
-                <a:spcPts val="600"/>
-              </a:spcAft>
-            </a:pPr>
-            <a:r>
-              <a:rPr sz="1500">
-                <a:solidFill>
-                  <a:srgbClr val="22282E"/>
-                </a:solidFill>
-              </a:rPr>
-              <a:t>•  Implementa manejo de errores: si falta nmap, avisa y termina con código distinto de 0.</a:t>
-            </a:r>
-          </a:p>
-          <a:p>
-            <a:pPr>
-              <a:spcAft>
-                <a:spcPts val="600"/>
-              </a:spcAft>
-            </a:pPr>
-            <a:r>
-              <a:rPr sz="1500">
-                <a:solidFill>
-                  <a:srgbClr val="22282E"/>
-                </a:solidFill>
-              </a:rPr>
-              <a:t>•  Crea una función que valide que el argumento es una IP bien formada.</a:t>
-            </a:r>
-          </a:p>
-          <a:p>
-            <a:pPr>
-              <a:spcAft>
-                <a:spcPts val="600"/>
-              </a:spcAft>
-            </a:pPr>
-            <a:r>
-              <a:rPr sz="1500">
-                <a:solidFill>
-                  <a:srgbClr val="22282E"/>
-                </a:solidFill>
-              </a:rPr>
-              <a:t>•  Usa trap para borrar un archivo temporal al salir, aun con Ctrl+C.</a:t>
-            </a:r>
-          </a:p>
-          <a:p>
-            <a:pPr>
-              <a:spcAft>
-                <a:spcPts val="600"/>
-              </a:spcAft>
-            </a:pPr>
-            <a:r>
-              <a:rPr sz="1500">
-                <a:solidFill>
-                  <a:srgbClr val="22282E"/>
-                </a:solidFill>
-              </a:rPr>
-              <a:t>•  Escribe un mini auditor que revise 3 controles de hardening y devuelva un resumen con conteo de OK/FALLO.</a:t>
+              <a:t>•  Necesitas Bash (ya presente en Linux y Kali), un editor cómodo (nano, vim o VS Code con la extensión de Bash) y ShellCheck para el análisis estático:</a:t>
+            </a:r>
+          </a:p>
+          <a:p>
+            <a:pPr>
+              <a:spcAft>
+                <a:spcPts val="600"/>
+              </a:spcAft>
+            </a:pPr>
+            <a:r>
+              <a:rPr sz="1500">
+                <a:solidFill>
+                  <a:srgbClr val="22282E"/>
+                </a:solidFill>
+              </a:rPr>
+              <a:t>•  Ten a mano las utilidades que orquestarás en las prácticas: ping, nc (netcat) y nmap si está instalado. Considera también integrar ShellCheck en tu editor para ver los avisos mientras escribes.…</a:t>
             </a:r>
           </a:p>
         </p:txBody>
@@ -4673,7 +5079,7 @@
                   <a:srgbClr val="0B3D2E"/>
                 </a:solidFill>
               </a:rPr>
-              <a:t>📝 Reto verificable</a:t>
+              <a:t>🧪 Laboratorio guiado</a:t>
             </a:r>
           </a:p>
         </p:txBody>
@@ -4711,22 +5117,97 @@
                   <a:srgbClr val="22282E"/>
                 </a:solidFill>
               </a:rPr>
-              <a:t>•  Entrega un script auditor.sh parametrizable que reciba una subred, descubra hosts activos, para cada uno compruebe si tiene el puerto 22 o 80 abierto, y genere un informe con marca de tiempo. Debe pasar ShellCheck sin avisos y usar set -euo pipefail.</a:t>
-            </a:r>
-          </a:p>
-          <a:p>
-            <a:pPr>
-              <a:spcAft>
-                <a:spcPts val="600"/>
-              </a:spcAft>
-            </a:pPr>
-            <a:r>
-              <a:rPr sz="1500">
-                <a:solidFill>
-                  <a:srgbClr val="22282E"/>
-                </a:solidFill>
-              </a:rPr>
-              <a:t>•  Criterio de aceptación: shellcheck auditor.sh no reporta problemas; ejecutado contra tu laboratorio produce un archivo de informe legible con hosts y puertos; y ante un argumento inválido termina con mensaje de uso y código de salida ≠ 0.</a:t>
+              <a:t>•  Esqueleto robusto. Crea barrido.sh con modo estricto y validación de argumento:</a:t>
+            </a:r>
+          </a:p>
+          <a:p>
+            <a:pPr>
+              <a:spcAft>
+                <a:spcPts val="600"/>
+              </a:spcAft>
+            </a:pPr>
+            <a:r>
+              <a:rPr sz="1500">
+                <a:solidFill>
+                  <a:srgbClr val="22282E"/>
+                </a:solidFill>
+              </a:rPr>
+              <a:t>•  Bucle de descubrimiento (ping sweep) sobre tu red interna:</a:t>
+            </a:r>
+          </a:p>
+          <a:p>
+            <a:pPr>
+              <a:spcAft>
+                <a:spcPts val="600"/>
+              </a:spcAft>
+            </a:pPr>
+            <a:r>
+              <a:rPr sz="1500">
+                <a:solidFill>
+                  <a:srgbClr val="22282E"/>
+                </a:solidFill>
+              </a:rPr>
+              <a:t>•  Ejecuta contra tu subred de laboratorio:</a:t>
+            </a:r>
+          </a:p>
+          <a:p>
+            <a:pPr>
+              <a:spcAft>
+                <a:spcPts val="600"/>
+              </a:spcAft>
+            </a:pPr>
+            <a:r>
+              <a:rPr sz="1500">
+                <a:solidFill>
+                  <a:srgbClr val="22282E"/>
+                </a:solidFill>
+              </a:rPr>
+              <a:t>•  Refactor a función. Extrae la comprobación a una función estaactivo() que reciba la IP y devuelva su código de salida, y llámala desde el bucle.</a:t>
+            </a:r>
+          </a:p>
+          <a:p>
+            <a:pPr>
+              <a:spcAft>
+                <a:spcPts val="600"/>
+              </a:spcAft>
+            </a:pPr>
+            <a:r>
+              <a:rPr sz="1500">
+                <a:solidFill>
+                  <a:srgbClr val="22282E"/>
+                </a:solidFill>
+              </a:rPr>
+              <a:t>•  Guardar resultados con marca de tiempo:</a:t>
+            </a:r>
+          </a:p>
+          <a:p>
+            <a:pPr>
+              <a:spcAft>
+                <a:spcPts val="600"/>
+              </a:spcAft>
+            </a:pPr>
+            <a:r>
+              <a:rPr sz="1500">
+                <a:solidFill>
+                  <a:srgbClr val="22282E"/>
+                </a:solidFill>
+              </a:rPr>
+              <a:t>•  y anexa los hallazgos con &gt;&gt; "$out".</a:t>
+            </a:r>
+          </a:p>
+          <a:p>
+            <a:pPr>
+              <a:spcAft>
+                <a:spcPts val="600"/>
+              </a:spcAft>
+            </a:pPr>
+            <a:r>
+              <a:rPr sz="1500">
+                <a:solidFill>
+                  <a:srgbClr val="22282E"/>
+                </a:solidFill>
+              </a:rPr>
+              <a:t>•  Chequeo de hardening. Un script que verifique si SSH permite login de root:</a:t>
             </a:r>
           </a:p>
         </p:txBody>
